--- a/docs/submission/summary_official.pptx
+++ b/docs/submission/summary_official.pptx
@@ -164,7 +164,7 @@
           <a:lstStyle/>
           <a:p>
             <a:r>
-              <a:t>単一臓器マッチング: 手法別マッチ数</a:t>
+              <a:t>交換cycle-cover: 移植数（不適合ペア数N別, 8シード平均）</a:t>
             </a:r>
           </a:p>
         </c:rich>
@@ -186,7 +186,7 @@
               <c:strCache>
                 <c:ptCount val="1"/>
                 <c:pt idx="0">
-                  <c:v>Greedy</c:v>
+                  <c:v>貪欲 cycle検出</c:v>
                 </c:pt>
               </c:strCache>
             </c:strRef>
@@ -197,19 +197,19 @@
               <c:strCache>
                 <c:ptCount val="5"/>
                 <c:pt idx="0">
-                  <c:v>N=20</c:v>
+                  <c:v>8</c:v>
                 </c:pt>
                 <c:pt idx="1">
-                  <c:v>N=30</c:v>
+                  <c:v>12</c:v>
                 </c:pt>
                 <c:pt idx="2">
-                  <c:v>N=50</c:v>
+                  <c:v>16</c:v>
                 </c:pt>
                 <c:pt idx="3">
-                  <c:v>N=75</c:v>
+                  <c:v>20</c:v>
                 </c:pt>
                 <c:pt idx="4">
-                  <c:v>N=100</c:v>
+                  <c:v>30</c:v>
                 </c:pt>
               </c:strCache>
             </c:strRef>
@@ -221,19 +221,19 @@
                 <c:formatCode>General</c:formatCode>
                 <c:ptCount val="5"/>
                 <c:pt idx="0">
-                  <c:v>19</c:v>
+                  <c:v>5.2</c:v>
                 </c:pt>
                 <c:pt idx="1">
-                  <c:v>23</c:v>
+                  <c:v>7.8</c:v>
                 </c:pt>
                 <c:pt idx="2">
-                  <c:v>38</c:v>
+                  <c:v>11.2</c:v>
                 </c:pt>
                 <c:pt idx="3">
-                  <c:v>67</c:v>
+                  <c:v>13.8</c:v>
                 </c:pt>
                 <c:pt idx="4">
-                  <c:v>84</c:v>
+                  <c:v>22.5</c:v>
                 </c:pt>
               </c:numCache>
             </c:numRef>
@@ -248,7 +248,7 @@
               <c:strCache>
                 <c:ptCount val="1"/>
                 <c:pt idx="0">
-                  <c:v>Hungarian(最適)</c:v>
+                  <c:v>QUBO(焼きなまし)</c:v>
                 </c:pt>
               </c:strCache>
             </c:strRef>
@@ -259,19 +259,19 @@
               <c:strCache>
                 <c:ptCount val="5"/>
                 <c:pt idx="0">
-                  <c:v>N=20</c:v>
+                  <c:v>8</c:v>
                 </c:pt>
                 <c:pt idx="1">
-                  <c:v>N=30</c:v>
+                  <c:v>12</c:v>
                 </c:pt>
                 <c:pt idx="2">
-                  <c:v>N=50</c:v>
+                  <c:v>16</c:v>
                 </c:pt>
                 <c:pt idx="3">
-                  <c:v>N=75</c:v>
+                  <c:v>20</c:v>
                 </c:pt>
                 <c:pt idx="4">
-                  <c:v>N=100</c:v>
+                  <c:v>30</c:v>
                 </c:pt>
               </c:strCache>
             </c:strRef>
@@ -283,81 +283,19 @@
                 <c:formatCode>General</c:formatCode>
                 <c:ptCount val="5"/>
                 <c:pt idx="0">
-                  <c:v>20</c:v>
+                  <c:v>6.8</c:v>
                 </c:pt>
                 <c:pt idx="1">
-                  <c:v>26</c:v>
+                  <c:v>10.0</c:v>
                 </c:pt>
                 <c:pt idx="2">
-                  <c:v>39</c:v>
+                  <c:v>13.9</c:v>
                 </c:pt>
                 <c:pt idx="3">
-                  <c:v>75</c:v>
+                  <c:v>17.4</c:v>
                 </c:pt>
                 <c:pt idx="4">
-                  <c:v>84</c:v>
-                </c:pt>
-              </c:numCache>
-            </c:numRef>
-          </c:val>
-        </c:ser>
-        <c:ser>
-          <c:idx val="2"/>
-          <c:order val="2"/>
-          <c:tx>
-            <c:strRef>
-              <c:f>Sheet1!$D$1</c:f>
-              <c:strCache>
-                <c:ptCount val="1"/>
-                <c:pt idx="0">
-                  <c:v>QUBO(焼きなまし)</c:v>
-                </c:pt>
-              </c:strCache>
-            </c:strRef>
-          </c:tx>
-          <c:cat>
-            <c:strRef>
-              <c:f>Sheet1!$A$2:$A$6</c:f>
-              <c:strCache>
-                <c:ptCount val="5"/>
-                <c:pt idx="0">
-                  <c:v>N=20</c:v>
-                </c:pt>
-                <c:pt idx="1">
-                  <c:v>N=30</c:v>
-                </c:pt>
-                <c:pt idx="2">
-                  <c:v>N=50</c:v>
-                </c:pt>
-                <c:pt idx="3">
-                  <c:v>N=75</c:v>
-                </c:pt>
-                <c:pt idx="4">
-                  <c:v>N=100</c:v>
-                </c:pt>
-              </c:strCache>
-            </c:strRef>
-          </c:cat>
-          <c:val>
-            <c:numRef>
-              <c:f>Sheet1!$D$2:$D$6</c:f>
-              <c:numCache>
-                <c:formatCode>General</c:formatCode>
-                <c:ptCount val="5"/>
-                <c:pt idx="0">
-                  <c:v>20</c:v>
-                </c:pt>
-                <c:pt idx="1">
-                  <c:v>26</c:v>
-                </c:pt>
-                <c:pt idx="2">
-                  <c:v>39</c:v>
-                </c:pt>
-                <c:pt idx="3">
-                  <c:v>74</c:v>
-                </c:pt>
-                <c:pt idx="4">
-                  <c:v>84</c:v>
+                  <c:v>26.2</c:v>
                 </c:pt>
               </c:numCache>
             </c:numRef>
@@ -4508,16 +4446,6 @@
                     <a:lstStyle/>
                     <a:p>
                       <a:pPr lvl="0"/>
-                      <a:r>
-                        <a:rPr sz="1200" b="0">
-                          <a:solidFill>
-                            <a:srgbClr val="1A1A1A"/>
-                          </a:solidFill>
-                          <a:latin typeface="ＭＳ Ｐゴシック"/>
-                          <a:ea typeface="ＭＳ Ｐゴシック"/>
-                        </a:rPr>
-                        <a:t>安河内 竜二</a:t>
-                      </a:r>
                     </a:p>
                   </a:txBody>
                   <a:tcPr>
@@ -4642,16 +4570,6 @@
                     <a:lstStyle/>
                     <a:p>
                       <a:pPr lvl="0"/>
-                      <a:r>
-                        <a:rPr sz="1200" b="0">
-                          <a:solidFill>
-                            <a:srgbClr val="1A1A1A"/>
-                          </a:solidFill>
-                          <a:latin typeface="ＭＳ Ｐゴシック"/>
-                          <a:ea typeface="ＭＳ Ｐゴシック"/>
-                        </a:rPr>
-                        <a:t>M2Labo</a:t>
-                      </a:r>
                     </a:p>
                   </a:txBody>
                   <a:tcPr>
@@ -6061,34 +5979,44 @@
           <a:p>
             <a:pPr lvl="0"/>
             <a:r>
-              <a:rPr sz="1100" b="0">
+              <a:rPr sz="1100" b="1">
                 <a:solidFill>
                   <a:srgbClr val="1A1A1A"/>
                 </a:solidFill>
                 <a:latin typeface="ＭＳ Ｐゴシック"/>
                 <a:ea typeface="ＭＳ Ｐゴシック"/>
               </a:rPr>
-              <a:t>脳死ドナー1人→最大8臓器の</a:t>
-            </a:r>
-            <a:r>
-              <a:rPr sz="1100" b="1">
+              <a:t>割当(単一/多臓器)は古典で最適に解ける</a:t>
+            </a:r>
+            <a:r>
+              <a:rPr sz="1100" b="0">
                 <a:solidFill>
                   <a:srgbClr val="1A1A1A"/>
                 </a:solidFill>
                 <a:latin typeface="ＭＳ Ｐゴシック"/>
                 <a:ea typeface="ＭＳ Ｐゴシック"/>
               </a:rPr>
-              <a:t>多臓器同時割当</a:t>
-            </a:r>
-            <a:r>
-              <a:rPr sz="1100" b="0">
+              <a:t>が、直接マッチング不成立の不適合ペアの</a:t>
+            </a:r>
+            <a:r>
+              <a:rPr sz="1100" b="1">
                 <a:solidFill>
                   <a:srgbClr val="1A1A1A"/>
                 </a:solidFill>
                 <a:latin typeface="ＭＳ Ｐゴシック"/>
                 <a:ea typeface="ＭＳ Ｐゴシック"/>
               </a:rPr>
-              <a:t>は臓器間相互依存・複合移植により多次元マッチング(k≥3でNP困難)。古典の多項式時間解なし</a:t>
+              <a:t>交換(2-/3-way cycle-cover)</a:t>
+            </a:r>
+            <a:r>
+              <a:rPr sz="1100" b="0">
+                <a:solidFill>
+                  <a:srgbClr val="1A1A1A"/>
+                </a:solidFill>
+                <a:latin typeface="ＭＳ Ｐゴシック"/>
+                <a:ea typeface="ＭＳ Ｐゴシック"/>
+              </a:rPr>
+              <a:t>は頂点素な最大重み集合パッキング=NP困難。貪欲は構造的に劣り大域最適化が要る</a:t>
             </a:r>
           </a:p>
         </p:txBody>
@@ -7602,7 +7530,7 @@
                 </a:solidFill>
                 <a:latin typeface="ＭＳ Ｐゴシック"/>
               </a:rPr>
-              <a:t>多臓器同時割当の組合せ最適化（k≥3でNP困難、Hungarian不可）</a:t>
+              <a:t>交換cycle-cover最適化（NP困難・集合パッキング）。多臓器割当は適合スコア応用層</a:t>
             </a:r>
           </a:p>
         </p:txBody>
@@ -8023,7 +7951,7 @@
                 <a:latin typeface="ＭＳ Ｐゴシック"/>
                 <a:ea typeface="ＭＳ Ｐゴシック"/>
               </a:rPr>
-              <a:t>多臓器同時割当:</a:t>
+              <a:t>交換cycle-cover:</a:t>
             </a:r>
             <a:r>
               <a:rPr sz="1100" b="0">
@@ -8033,7 +7961,7 @@
                 <a:latin typeface="ＭＳ Ｐゴシック"/>
                 <a:ea typeface="ＭＳ Ｐゴシック"/>
               </a:rPr>
-              <a:t> OPTN/SRTR 2023の文献値でパラメータを事前固定(SLK 7.9%/SPK 79.2%/心肺1.3%、脳死130件/年)。Independent greedy vs QUBO joint optimizationを比較</a:t>
+              <a:t> ランダム不適合プールで貪欲サイクル検出 vs QUBO(焼きなまし) vs 厳密最適を移植数で比較(各サイズ8シード、2-/3-way)。多臓器割当はOPTN/SRTR 2023文献値で適合スコアを検証</a:t>
             </a:r>
           </a:p>
           <a:p>
@@ -8282,7 +8210,7 @@
                 <a:latin typeface="ＭＳ Ｐゴシック"/>
                 <a:ea typeface="ＭＳ Ｐゴシック"/>
               </a:rPr>
-              <a:t>多臓器(核心):</a:t>
+              <a:t>多臓器(負の結果):</a:t>
             </a:r>
             <a:r>
               <a:rPr sz="1100" b="0">
@@ -8292,7 +8220,7 @@
                 <a:latin typeface="ＭＳ Ｐゴシック"/>
                 <a:ea typeface="ＭＳ Ｐゴシック"/>
               </a:rPr>
-              <a:t> スコア差は±数%で非有意だが質的差は決定的。Independent greedyは複合移植患者への完全割当が全シナリオ</a:t>
+              <a:t> 救命数では分離可能=smart greedy=QUBO=厳密最適、量子優位なし。</a:t>
             </a:r>
             <a:r>
               <a:rPr sz="1100" b="1">
@@ -8302,7 +8230,7 @@
                 <a:latin typeface="ＭＳ Ｐゴシック"/>
                 <a:ea typeface="ＭＳ Ｐゴシック"/>
               </a:rPr>
-              <a:t>0件</a:t>
+              <a:t>交換cycle-cover(本命):</a:t>
             </a:r>
             <a:r>
               <a:rPr sz="1100" b="0">
@@ -8312,7 +8240,7 @@
                 <a:latin typeface="ＭＳ Ｐゴシック"/>
                 <a:ea typeface="ＭＳ Ｐゴシック"/>
               </a:rPr>
-              <a:t>、QUBO joint最適化は</a:t>
+              <a:t> QUBOが貪欲に</a:t>
             </a:r>
             <a:r>
               <a:rPr sz="1100" b="1">
@@ -8322,7 +8250,7 @@
                 <a:latin typeface="ＭＳ Ｐゴシック"/>
                 <a:ea typeface="ＭＳ Ｐゴシック"/>
               </a:rPr>
-              <a:t>2-4人</a:t>
+              <a:t>8/8勝利</a:t>
             </a:r>
             <a:r>
               <a:rPr sz="1100" b="0">
@@ -8332,7 +8260,7 @@
                 <a:latin typeface="ＭＳ Ｐゴシック"/>
                 <a:ea typeface="ＭＳ Ｐゴシック"/>
               </a:rPr>
-              <a:t>に両臓器を割当</a:t>
+              <a:t>・厳密最適に一致・差は規模で拡大(+1.5→+3.8移植)</a:t>
             </a:r>
           </a:p>
           <a:p>
@@ -8711,7 +8639,7 @@
                 <a:latin typeface="ＭＳ Ｐゴシック"/>
                 <a:ea typeface="ＭＳ Ｐゴシック"/>
               </a:rPr>
-              <a:t>単一臓器はHungarianで十分だが、複合移植・多臓器同時割当ではIndependent手法が</a:t>
+              <a:t>割当(単一/多臓器)は古典で十分。</a:t>
             </a:r>
             <a:r>
               <a:rPr sz="1100" b="1">
@@ -8721,7 +8649,7 @@
                 <a:latin typeface="ＭＳ Ｐゴシック"/>
                 <a:ea typeface="ＭＳ Ｐゴシック"/>
               </a:rPr>
-              <a:t>構造的に不可能</a:t>
+              <a:t>真にNP困難な交換cycle-coverでQUBOが必要</a:t>
             </a:r>
             <a:r>
               <a:rPr sz="1100" b="0">
@@ -8731,7 +8659,7 @@
                 <a:latin typeface="ＭＳ Ｐゴシック"/>
                 <a:ea typeface="ＭＳ Ｐゴシック"/>
               </a:rPr>
-              <a:t> → QUBOが必要</a:t>
+              <a:t> — 貪欲は容易な2-wayを取り優れた3-wayを潰す</a:t>
             </a:r>
           </a:p>
           <a:p>
@@ -9427,7 +9355,7 @@
                 <a:latin typeface="ＭＳ Ｐゴシック"/>
                 <a:ea typeface="ＭＳ Ｐゴシック"/>
               </a:rPr>
-              <a:t>遺伝学展開(80億×80億のペア比較)では量子が「あれば速い」ではなく</a:t>
+              <a:t>遺伝学展開(80億規模)では最適化が組み合わせ的に爆発し古典厳密解が破綻、</a:t>
             </a:r>
             <a:r>
               <a:rPr sz="1150" b="1">
@@ -9437,7 +9365,7 @@
                 <a:latin typeface="ＭＳ Ｐゴシック"/>
                 <a:ea typeface="ＭＳ Ｐゴシック"/>
               </a:rPr>
-              <a:t>「ないと解けない」前提条件</a:t>
+              <a:t>量子アニーリングがスケーラブルな求解経路</a:t>
             </a:r>
             <a:r>
               <a:rPr sz="1150" b="0">
@@ -9447,7 +9375,7 @@
                 <a:latin typeface="ＭＳ Ｐゴシック"/>
                 <a:ea typeface="ＭＳ Ｐゴシック"/>
               </a:rPr>
-              <a:t>になる</a:t>
+              <a:t>になる(forward-looking)</a:t>
             </a:r>
           </a:p>
           <a:p>
@@ -11030,24 +10958,24 @@
           <a:p>
             <a:pPr lvl="0"/>
             <a:r>
-              <a:rPr sz="1050" b="0">
+              <a:rPr sz="1050" b="1">
                 <a:solidFill>
                   <a:srgbClr val="1A1A1A"/>
                 </a:solidFill>
                 <a:latin typeface="ＭＳ Ｐゴシック"/>
                 <a:ea typeface="ＭＳ Ｐゴシック"/>
               </a:rPr>
-              <a:t>多臓器同時割当(k≥3でNP困難)でQUBOの優位性が発現。複合移植患者への質的対応(Independent 0件 vs QUBO 2-4人)。遺伝学展開では量子が</a:t>
-            </a:r>
-            <a:r>
-              <a:rPr sz="1050" b="1">
+              <a:t>交換cycle-cover(NP困難・APX困難)でQUBOの優位性が発現</a:t>
+            </a:r>
+            <a:r>
+              <a:rPr sz="1050" b="0">
                 <a:solidFill>
                   <a:srgbClr val="1A1A1A"/>
                 </a:solidFill>
                 <a:latin typeface="ＭＳ Ｐゴシック"/>
                 <a:ea typeface="ＭＳ Ｐゴシック"/>
               </a:rPr>
-              <a:t>必要条件</a:t>
+              <a:t>(貪欲に8/8勝・厳密最適一致・差は規模で拡大)。多臓器割当は分離可能で量子優位なし(正直な負の結果)</a:t>
             </a:r>
           </a:p>
         </p:txBody>
@@ -11489,7 +11417,7 @@
                 <a:latin typeface="ＭＳ Ｐゴシック"/>
                 <a:ea typeface="ＭＳ Ｐゴシック"/>
               </a:rPr>
-              <a:t>(計算層を破っても個人情報に到達不能)／MKFHE限界の特定→Threshold FHE+hyde転換／FHE・MKFHE bootstrapping Rust実装(GPU14x)／TEE認証ゲート型暗号化／Threshold FHE+ZKP+PQC+TEE+多臓器QUBO統合</a:t>
+              <a:t>(計算層を破っても個人情報に到達不能)／MKFHE限界の特定→Threshold FHE+hyde転換／FHE・MKFHE bootstrapping Rust実装(GPU14x)／TEE認証ゲート型暗号化／Threshold FHE+ZKP+PQC+TEE+交換cycle-cover QUBO統合</a:t>
             </a:r>
           </a:p>
         </p:txBody>
@@ -12285,7 +12213,7 @@
                           </a:solidFill>
                           <a:latin typeface="ＭＳ Ｐゴシック"/>
                         </a:rPr>
-                        <a:t>◎ QUBO(多臓器同時)</a:t>
+                        <a:t>◎ QUBO(交換cycle-cover)</a:t>
                       </a:r>
                     </a:p>
                   </a:txBody>
@@ -12517,24 +12445,24 @@
           <a:lstStyle/>
           <a:p>
             <a:r>
+              <a:rPr sz="1050" b="1">
+                <a:solidFill>
+                  <a:srgbClr val="333333"/>
+                </a:solidFill>
+                <a:latin typeface="ＭＳ Ｐゴシック"/>
+              </a:rPr>
+              <a:t>交換cycle-cover(NP困難)でQUBOは貪欲を全インスタンス(8/8)で上回り、厳密解可能域で厳密最適に一致。差は規模で拡大。</a:t>
+            </a:r>
+          </a:p>
+          <a:p>
+            <a:r>
               <a:rPr sz="1050" b="0">
                 <a:solidFill>
                   <a:srgbClr val="333333"/>
                 </a:solidFill>
                 <a:latin typeface="ＭＳ Ｐゴシック"/>
               </a:rPr>
-              <a:t>単一臓器ではHungarian(O(N³))が最適、QUBOはほぼ同等で優位性なし（正直な結果）。</a:t>
-            </a:r>
-          </a:p>
-          <a:p>
-            <a:r>
-              <a:rPr sz="1050" b="1">
-                <a:solidFill>
-                  <a:srgbClr val="333333"/>
-                </a:solidFill>
-                <a:latin typeface="ＭＳ Ｐゴシック"/>
-              </a:rPr>
-              <a:t>量子の真価は多臓器同時割当に現れる ↓</a:t>
+              <a:t>単一臓器・多臓器割当は古典で最適＝量子優位なし（正直な切り分け）→</a:t>
             </a:r>
           </a:p>
         </p:txBody>
@@ -12554,7 +12482,7 @@
             <a:avLst/>
           </a:prstGeom>
           <a:solidFill>
-            <a:srgbClr val="3A6B35"/>
+            <a:srgbClr val="6B6B6B"/>
           </a:solidFill>
           <a:ln w="9525">
             <a:solidFill>
@@ -12589,7 +12517,7 @@
                 </a:solidFill>
                 <a:latin typeface="ＭＳ Ｐゴシック"/>
               </a:rPr>
-              <a:t>多臓器同時割当（核心）</a:t>
+              <a:t>割当は分離可能（量子は不要）</a:t>
             </a:r>
           </a:p>
           <a:p>
@@ -12601,7 +12529,7 @@
                 </a:solidFill>
                 <a:latin typeface="ＭＳ Ｐゴシック"/>
               </a:rPr>
-              <a:t>複合移植患者への両臓器割当：Independent greedy 0件 / QUBO 2〜4人/シナリオ（OPTN/SRTR 2023文献値で事前固定）。k≥3でNP困難、Hungarian適用不可</a:t>
+              <a:t>単一臓器=Hungarian最適。多臓器同時割当も救命数では smart greedy=QUBO=厳密最適。当初の複合移植優位仮説はベンチで否定（正直な負の結果）</a:t>
             </a:r>
           </a:p>
         </p:txBody>

--- a/docs/submission/summary_official.pptx
+++ b/docs/submission/summary_official.pptx
@@ -6230,7 +6230,7 @@
                 <a:latin typeface="ＭＳ Ｐゴシック"/>
                 <a:ea typeface="ＭＳ Ｐゴシック"/>
               </a:rPr>
-              <a:t>「個人情報を保護しながら共有する」のではなく</a:t>
+              <a:t>「個人情報を保護する」だけでなく</a:t>
             </a:r>
             <a:r>
               <a:rPr sz="1100" b="1">
@@ -6240,11 +6240,8 @@
                 <a:latin typeface="ＭＳ Ｐゴシック"/>
                 <a:ea typeface="ＭＳ Ｐゴシック"/>
               </a:rPr>
-              <a:t>「共有データから個人情報という性質を消す」</a:t>
-            </a:r>
-          </a:p>
-          <a:p>
-            <a:pPr lvl="0"/>
+              <a:t>「共有時点で受領者にとっての識別性を暗号学的に消す」</a:t>
+            </a:r>
             <a:r>
               <a:rPr sz="1100" b="0">
                 <a:solidFill>
@@ -6253,31 +6250,31 @@
                 <a:latin typeface="ＭＳ Ｐゴシック"/>
                 <a:ea typeface="ＭＳ Ｐゴシック"/>
               </a:rPr>
-              <a:t>暗号を</a:t>
-            </a:r>
-            <a:r>
-              <a:rPr sz="1100" b="1">
+              <a:t>（受領者視点。元の管理者には個人情報として適用継続）</a:t>
+            </a:r>
+          </a:p>
+          <a:p>
+            <a:pPr lvl="0"/>
+            <a:r>
+              <a:rPr sz="1100" b="0">
                 <a:solidFill>
                   <a:srgbClr val="1A1A1A"/>
                 </a:solidFill>
                 <a:latin typeface="ＭＳ Ｐゴシック"/>
                 <a:ea typeface="ＭＳ Ｐゴシック"/>
               </a:rPr>
-              <a:t>計算層と保護層に分離</a:t>
-            </a:r>
-            <a:r>
-              <a:rPr sz="1100" b="0">
+              <a:t>暗号を</a:t>
+            </a:r>
+            <a:r>
+              <a:rPr sz="1100" b="1">
                 <a:solidFill>
                   <a:srgbClr val="1A1A1A"/>
                 </a:solidFill>
                 <a:latin typeface="ＭＳ Ｐゴシック"/>
                 <a:ea typeface="ＭＳ Ｐゴシック"/>
               </a:rPr>
-              <a:t>し、計算層を完全に破っても個人情報に到達不能な設計原則を確立</a:t>
-            </a:r>
-          </a:p>
-          <a:p>
-            <a:pPr lvl="0"/>
+              <a:t>計算層と保護層に分離</a:t>
+            </a:r>
             <a:r>
               <a:rPr sz="1100" b="0">
                 <a:solidFill>
@@ -6286,7 +6283,20 @@
                 <a:latin typeface="ＭＳ Ｐゴシック"/>
                 <a:ea typeface="ＭＳ Ｐゴシック"/>
               </a:rPr>
-              <a:t>hyde暗号文は鍵なしでは乱数と計算量的に区別不能 → 個人情報保護法の「特定個人を識別できる情報」に該当しない</a:t>
+              <a:t>し、計算層を完全に破っても個人情報に到達不能な設計原則を確立</a:t>
+            </a:r>
+          </a:p>
+          <a:p>
+            <a:pPr lvl="0"/>
+            <a:r>
+              <a:rPr sz="1100" b="0">
+                <a:solidFill>
+                  <a:srgbClr val="1A1A1A"/>
+                </a:solidFill>
+                <a:latin typeface="ＭＳ Ｐゴシック"/>
+                <a:ea typeface="ＭＳ Ｐゴシック"/>
+              </a:rPr>
+              <a:t>hyde暗号文は鍵なしでは乱数と区別不能 → 再識別手段を持たない受領者の視点では「個人データ」に該当しないと合理的に主張可（ECJ SRB判決の射程、元管理者の義務は残る）</a:t>
             </a:r>
           </a:p>
           <a:p>
@@ -7696,7 +7706,7 @@
                 </a:solidFill>
                 <a:latin typeface="ＭＳ Ｐゴシック"/>
               </a:rPr>
-              <a:t>個人情報（氏名・連絡先）を計算層から暗号学的に分離。鍵はTPMに紐づき個人が保管。暗号文は鍵なしでは乱数と区別不能＝「個人情報」に該当しない</a:t>
+              <a:t>個人情報（氏名・連絡先）を計算層から暗号学的に分離。鍵はTPMに紐づき個人が保管。暗号文は鍵なしでは乱数と区別不能＝受領者視点で識別性なし（元管理者には適用継続）</a:t>
             </a:r>
           </a:p>
         </p:txBody>
@@ -10299,7 +10309,7 @@
                 <a:latin typeface="ＭＳ Ｐゴシック"/>
                 <a:ea typeface="ＭＳ Ｐゴシック"/>
               </a:rPr>
-              <a:t> 待機中死亡の減少、恣意性排除と公平性の数学的保証、データ主権を個人へ。 </a:t>
+              <a:t> 待機中死亡の減少、計算過程の手続き的恣意性の排除と評価関数の透明化、データ主権を個人へ。 </a:t>
             </a:r>
             <a:r>
               <a:rPr sz="1050" b="1">

--- a/docs/submission/summary_official.pptx
+++ b/docs/submission/summary_official.pptx
@@ -5901,7 +5901,7 @@
                 <a:latin typeface="ＭＳ Ｐゴシック"/>
                 <a:ea typeface="ＭＳ Ｐゴシック"/>
               </a:rPr>
-              <a:t>臓器移植マッチングは計算能力だけでは解決できない。</a:t>
+              <a:t>医療データは『出せない』ために最適化できない。創薬では薬剤治療データ（治験・失敗例）が企業ごとに分断、臓器移植では病院が患者データを共有しない — </a:t>
             </a:r>
             <a:r>
               <a:rPr sz="1100" b="1">
@@ -5911,7 +5911,7 @@
                 <a:latin typeface="ＭＳ Ｐゴシック"/>
                 <a:ea typeface="ＭＳ Ｐゴシック"/>
               </a:rPr>
-              <a:t>病院が医療データを共有せず、最適化すべきデータが揃わない</a:t>
+              <a:t>共有できないことが根本原因</a:t>
             </a:r>
             <a:r>
               <a:rPr sz="1100" b="0">
@@ -5921,7 +5921,7 @@
                 <a:latin typeface="ＭＳ Ｐゴシック"/>
                 <a:ea typeface="ＭＳ Ｐゴシック"/>
               </a:rPr>
-              <a:t>ことが根本原因。</a:t>
+              <a:t>。本基盤は汎用で、最も切迫した臓器移植を最初の実証、本命適用先を創薬データ共有に置く。</a:t>
             </a:r>
           </a:p>
           <a:p>
@@ -10309,7 +10309,7 @@
                 <a:latin typeface="ＭＳ Ｐゴシック"/>
                 <a:ea typeface="ＭＳ Ｐゴシック"/>
               </a:rPr>
-              <a:t> 待機中死亡の減少、計算過程の手続き的恣意性の排除と評価関数の透明化、データ主権を個人へ。 </a:t>
+              <a:t> 待機中死亡の減少、手続き的恣意性の排除と評価関数の透明化、データ主権を個人へ。基盤はQoL領域横断（創薬効率化・治験・希少疾患・遺伝学）に展開。 </a:t>
             </a:r>
             <a:r>
               <a:rPr sz="1050" b="1">
@@ -10319,7 +10319,7 @@
                 <a:latin typeface="ＭＳ Ｐゴシック"/>
                 <a:ea typeface="ＭＳ Ｐゴシック"/>
               </a:rPr>
-              <a:t>経済:</a:t>
+              <a:t>経済(臓器移植の実証規模):</a:t>
             </a:r>
             <a:r>
               <a:rPr sz="1050" b="0">
@@ -10975,7 +10975,7 @@
                 <a:latin typeface="ＭＳ Ｐゴシック"/>
                 <a:ea typeface="ＭＳ Ｐゴシック"/>
               </a:rPr>
-              <a:t>交換cycle-cover(NP困難・APX困難)でQUBOの優位性が発現</a:t>
+              <a:t>今までになかった量子有用性を創出する問題構造の発見</a:t>
             </a:r>
             <a:r>
               <a:rPr sz="1050" b="0">
@@ -10985,7 +10985,27 @@
                 <a:latin typeface="ＭＳ Ｐゴシック"/>
                 <a:ea typeface="ＭＳ Ｐゴシック"/>
               </a:rPr>
-              <a:t>(貪欲に8/8勝・厳密最適一致・差は規模で拡大)。多臓器割当は分離可能で量子優位なし(正直な負の結果)</a:t>
+              <a:t>：割当は分離可能で量子不要(負の結果)→</a:t>
+            </a:r>
+            <a:r>
+              <a:rPr sz="1050" b="1">
+                <a:solidFill>
+                  <a:srgbClr val="1A1A1A"/>
+                </a:solidFill>
+                <a:latin typeface="ＭＳ Ｐゴシック"/>
+                <a:ea typeface="ＭＳ Ｐゴシック"/>
+              </a:rPr>
+              <a:t>交換cycle-cover(NP困難・APX困難)はQUBOが効く</a:t>
+            </a:r>
+            <a:r>
+              <a:rPr sz="1050" b="0">
+                <a:solidFill>
+                  <a:srgbClr val="1A1A1A"/>
+                </a:solidFill>
+                <a:latin typeface="ＭＳ Ｐゴシック"/>
+                <a:ea typeface="ＭＳ Ｐゴシック"/>
+              </a:rPr>
+              <a:t>(正の結果)。貪欲に8/8勝・厳密最適一致・差は規模で拡大。問題のカテゴリを正しく選び直した</a:t>
             </a:r>
           </a:p>
         </p:txBody>

--- a/docs/submission/summary_official.pptx
+++ b/docs/submission/summary_official.pptx
@@ -9565,7 +9565,7 @@
                 <a:latin typeface="ＭＳ Ｐゴシック"/>
                 <a:ea typeface="ＭＳ Ｐゴシック"/>
               </a:rPr>
-              <a:t>Q-2の根本障壁=医療データ共有のプライバシー問題をFHEで解消し量子最適化を適用。病院も国家も鍵に関与せず</a:t>
+              <a:t>Q-2の根本障壁=医療データ共有のプライバシー問題を計算層・保護層の分離で解消し量子最適化を適用。</a:t>
             </a:r>
             <a:r>
               <a:rPr sz="1050" b="1">
@@ -9575,7 +9575,7 @@
                 <a:latin typeface="ＭＳ Ｐゴシック"/>
                 <a:ea typeface="ＭＳ Ｐゴシック"/>
               </a:rPr>
-              <a:t>個人のデータ主権を暗号学的に保証</a:t>
+              <a:t>身元情報の鍵は個人がTPM保持／計算の鍵はt-of-n閾値機関に分散＝単一機関に鍵が集中しない</a:t>
             </a:r>
             <a:r>
               <a:rPr sz="1050" b="0">

--- a/docs/submission/summary_official.pptx
+++ b/docs/submission/summary_official.pptx
@@ -9329,7 +9329,7 @@
                 <a:latin typeface="ＭＳ Ｐゴシック"/>
                 <a:ea typeface="ＭＳ Ｐゴシック"/>
               </a:rPr>
-              <a:t>FTQC(2030-2040)完成で: 量子実機のQUBO求解がシミュレータを凌駕／N≥10,000の厳密解が到達可能</a:t>
+              <a:t>FTQC(2030-2040)で大規模化: 問題構造はSAで実証済、実機での求解時間・解品質の比較は今後の課題／N≥10,000へは古典手法との併用で拡張</a:t>
             </a:r>
           </a:p>
           <a:p>

--- a/docs/submission/summary_official.pptx
+++ b/docs/submission/summary_official.pptx
@@ -8293,7 +8293,7 @@
                 <a:latin typeface="ＭＳ Ｐゴシック"/>
                 <a:ea typeface="ＭＳ Ｐゴシック"/>
               </a:rPr>
-              <a:t> composite_score 21µs、full pipeline </a:t>
+              <a:t> composite_score 21µs(test_small)、full pipeline </a:t>
             </a:r>
             <a:r>
               <a:rPr sz="1100" b="1">
@@ -12626,7 +12626,7 @@
                 </a:solidFill>
                 <a:latin typeface="ＭＳ Ｐゴシック"/>
               </a:rPr>
-              <a:t>composite_score 21µs ／ full pipeline 50.91ms/ペア（production_8192, N=8192）。MKFHE bootstrappingで異鍵暗号文の比較を復号なしで実証</a:t>
+              <a:t>composite_score 21µs（test_small）／ full pipeline 50.91ms/ペア（production_8192, N=8192）。MKFHE bootstrappingで異鍵暗号文の比較を復号なしで実証</a:t>
             </a:r>
           </a:p>
         </p:txBody>

--- a/docs/submission/summary_official.pptx
+++ b/docs/submission/summary_official.pptx
@@ -5090,6 +5090,16 @@
                     <a:lstStyle/>
                     <a:p>
                       <a:pPr lvl="0"/>
+                      <a:r>
+                        <a:rPr sz="1200" b="0">
+                          <a:solidFill>
+                            <a:srgbClr val="1A1A1A"/>
+                          </a:solidFill>
+                          <a:latin typeface="ＭＳ Ｐゴシック"/>
+                          <a:ea typeface="ＭＳ Ｐゴシック"/>
+                        </a:rPr>
+                        <a:t>スクリーニング採択者でないため該当なし</a:t>
+                      </a:r>
                     </a:p>
                   </a:txBody>
                   <a:tcPr>

--- a/docs/submission/summary_official.pptx
+++ b/docs/submission/summary_official.pptx
@@ -8280,7 +8280,7 @@
                 <a:latin typeface="ＭＳ Ｐゴシック"/>
                 <a:ea typeface="ＭＳ Ｐゴシック"/>
               </a:rPr>
-              <a:t>・厳密最適に一致・差は規模で拡大(+1.5→+3.8移植)</a:t>
+              <a:t>・厳密最適に一致・差は規模で拡大(+1.6→+3.7移植)</a:t>
             </a:r>
           </a:p>
           <a:p>
